--- a/Diagrams/K-M Stability Map.pptx
+++ b/Diagrams/K-M Stability Map.pptx
@@ -123,6 +123,59 @@
 </p:presentation>
 </file>
 
+<file path=ppt/revisionInfo.xml><?xml version="1.0" encoding="utf-8"?>
+<p1510:revInfo xmlns:a="http://schemas.openxmlformats.org/drawingml/2006/main" xmlns:r="http://schemas.openxmlformats.org/officeDocument/2006/relationships" xmlns:p1510="http://schemas.microsoft.com/office/powerpoint/2015/10/main">
+  <p1510:revLst>
+    <p1510:client id="{CBDB8091-8E2A-48F0-8DDB-C64CB3DD29F1}" v="1" dt="2026-06-07T18:36:56.415"/>
+  </p1510:revLst>
+</p1510:revInfo>
+</file>
+
+<file path=ppt/changesInfos/changesInfo1.xml><?xml version="1.0" encoding="utf-8"?>
+<pc:chgInfo xmlns:a="http://schemas.openxmlformats.org/drawingml/2006/main" xmlns:r="http://schemas.openxmlformats.org/officeDocument/2006/relationships" xmlns:ac="http://schemas.microsoft.com/office/drawing/2013/main/command" xmlns:pc="http://schemas.microsoft.com/office/powerpoint/2013/main/command">
+  <pc:docChgLst>
+    <pc:chgData name="Steve Coe" userId="c022ba151d941ebf" providerId="LiveId" clId="{CA44BCD1-603D-4FC5-A303-389B531CAC82}"/>
+    <pc:docChg chg="modSld">
+      <pc:chgData name="Steve Coe" userId="c022ba151d941ebf" providerId="LiveId" clId="{CA44BCD1-603D-4FC5-A303-389B531CAC82}" dt="2026-06-07T18:37:14.041" v="3" actId="113"/>
+      <pc:docMkLst>
+        <pc:docMk/>
+      </pc:docMkLst>
+      <pc:sldChg chg="addSp modSp mod">
+        <pc:chgData name="Steve Coe" userId="c022ba151d941ebf" providerId="LiveId" clId="{CA44BCD1-603D-4FC5-A303-389B531CAC82}" dt="2026-06-07T18:37:14.041" v="3" actId="113"/>
+        <pc:sldMkLst>
+          <pc:docMk/>
+          <pc:sldMk cId="1224520333" sldId="256"/>
+        </pc:sldMkLst>
+        <pc:spChg chg="mod">
+          <ac:chgData name="Steve Coe" userId="c022ba151d941ebf" providerId="LiveId" clId="{CA44BCD1-603D-4FC5-A303-389B531CAC82}" dt="2026-06-07T18:37:14.041" v="3" actId="113"/>
+          <ac:spMkLst>
+            <pc:docMk/>
+            <pc:sldMk cId="1224520333" sldId="256"/>
+            <ac:spMk id="60" creationId="{BF9F3910-9EC4-3AF2-7C02-1F40CF74E3D2}"/>
+          </ac:spMkLst>
+        </pc:spChg>
+        <pc:cxnChg chg="add">
+          <ac:chgData name="Steve Coe" userId="c022ba151d941ebf" providerId="LiveId" clId="{CA44BCD1-603D-4FC5-A303-389B531CAC82}" dt="2026-06-07T18:36:53.511" v="0" actId="11529"/>
+          <ac:cxnSpMkLst>
+            <pc:docMk/>
+            <pc:sldMk cId="1224520333" sldId="256"/>
+            <ac:cxnSpMk id="3" creationId="{8A83D3BC-7C20-6DDA-E88F-CB9000D04916}"/>
+          </ac:cxnSpMkLst>
+        </pc:cxnChg>
+        <pc:cxnChg chg="add mod">
+          <ac:chgData name="Steve Coe" userId="c022ba151d941ebf" providerId="LiveId" clId="{CA44BCD1-603D-4FC5-A303-389B531CAC82}" dt="2026-06-07T18:37:03.935" v="2" actId="1076"/>
+          <ac:cxnSpMkLst>
+            <pc:docMk/>
+            <pc:sldMk cId="1224520333" sldId="256"/>
+            <ac:cxnSpMk id="4" creationId="{88B45C41-72B4-C44E-65AF-B70E3347CDF9}"/>
+          </ac:cxnSpMkLst>
+        </pc:cxnChg>
+      </pc:sldChg>
+    </pc:docChg>
+  </pc:docChgLst>
+</pc:chgInfo>
+</file>
+
 <file path=ppt/slideLayouts/slideLayout1.xml><?xml version="1.0" encoding="utf-8"?>
 <p:sldLayout xmlns:a="http://schemas.openxmlformats.org/drawingml/2006/main" xmlns:r="http://schemas.openxmlformats.org/officeDocument/2006/relationships" xmlns:p="http://schemas.openxmlformats.org/presentationml/2006/main" type="title" preserve="1">
   <p:cSld name="Title Slide">
@@ -270,7 +323,7 @@
           <a:p>
             <a:fld id="{927FDCA2-3392-4A1A-9223-3DBB816C2ADB}" type="datetimeFigureOut">
               <a:rPr lang="en-GB" smtClean="0"/>
-              <a:t>05/06/2026</a:t>
+              <a:t>07/06/2026</a:t>
             </a:fld>
             <a:endParaRPr lang="en-GB"/>
           </a:p>
@@ -468,7 +521,7 @@
           <a:p>
             <a:fld id="{927FDCA2-3392-4A1A-9223-3DBB816C2ADB}" type="datetimeFigureOut">
               <a:rPr lang="en-GB" smtClean="0"/>
-              <a:t>05/06/2026</a:t>
+              <a:t>07/06/2026</a:t>
             </a:fld>
             <a:endParaRPr lang="en-GB"/>
           </a:p>
@@ -676,7 +729,7 @@
           <a:p>
             <a:fld id="{927FDCA2-3392-4A1A-9223-3DBB816C2ADB}" type="datetimeFigureOut">
               <a:rPr lang="en-GB" smtClean="0"/>
-              <a:t>05/06/2026</a:t>
+              <a:t>07/06/2026</a:t>
             </a:fld>
             <a:endParaRPr lang="en-GB"/>
           </a:p>
@@ -874,7 +927,7 @@
           <a:p>
             <a:fld id="{927FDCA2-3392-4A1A-9223-3DBB816C2ADB}" type="datetimeFigureOut">
               <a:rPr lang="en-GB" smtClean="0"/>
-              <a:t>05/06/2026</a:t>
+              <a:t>07/06/2026</a:t>
             </a:fld>
             <a:endParaRPr lang="en-GB"/>
           </a:p>
@@ -1149,7 +1202,7 @@
           <a:p>
             <a:fld id="{927FDCA2-3392-4A1A-9223-3DBB816C2ADB}" type="datetimeFigureOut">
               <a:rPr lang="en-GB" smtClean="0"/>
-              <a:t>05/06/2026</a:t>
+              <a:t>07/06/2026</a:t>
             </a:fld>
             <a:endParaRPr lang="en-GB"/>
           </a:p>
@@ -1414,7 +1467,7 @@
           <a:p>
             <a:fld id="{927FDCA2-3392-4A1A-9223-3DBB816C2ADB}" type="datetimeFigureOut">
               <a:rPr lang="en-GB" smtClean="0"/>
-              <a:t>05/06/2026</a:t>
+              <a:t>07/06/2026</a:t>
             </a:fld>
             <a:endParaRPr lang="en-GB"/>
           </a:p>
@@ -1826,7 +1879,7 @@
           <a:p>
             <a:fld id="{927FDCA2-3392-4A1A-9223-3DBB816C2ADB}" type="datetimeFigureOut">
               <a:rPr lang="en-GB" smtClean="0"/>
-              <a:t>05/06/2026</a:t>
+              <a:t>07/06/2026</a:t>
             </a:fld>
             <a:endParaRPr lang="en-GB"/>
           </a:p>
@@ -1967,7 +2020,7 @@
           <a:p>
             <a:fld id="{927FDCA2-3392-4A1A-9223-3DBB816C2ADB}" type="datetimeFigureOut">
               <a:rPr lang="en-GB" smtClean="0"/>
-              <a:t>05/06/2026</a:t>
+              <a:t>07/06/2026</a:t>
             </a:fld>
             <a:endParaRPr lang="en-GB"/>
           </a:p>
@@ -2080,7 +2133,7 @@
           <a:p>
             <a:fld id="{927FDCA2-3392-4A1A-9223-3DBB816C2ADB}" type="datetimeFigureOut">
               <a:rPr lang="en-GB" smtClean="0"/>
-              <a:t>05/06/2026</a:t>
+              <a:t>07/06/2026</a:t>
             </a:fld>
             <a:endParaRPr lang="en-GB"/>
           </a:p>
@@ -2391,7 +2444,7 @@
           <a:p>
             <a:fld id="{927FDCA2-3392-4A1A-9223-3DBB816C2ADB}" type="datetimeFigureOut">
               <a:rPr lang="en-GB" smtClean="0"/>
-              <a:t>05/06/2026</a:t>
+              <a:t>07/06/2026</a:t>
             </a:fld>
             <a:endParaRPr lang="en-GB"/>
           </a:p>
@@ -2679,7 +2732,7 @@
           <a:p>
             <a:fld id="{927FDCA2-3392-4A1A-9223-3DBB816C2ADB}" type="datetimeFigureOut">
               <a:rPr lang="en-GB" smtClean="0"/>
-              <a:t>05/06/2026</a:t>
+              <a:t>07/06/2026</a:t>
             </a:fld>
             <a:endParaRPr lang="en-GB"/>
           </a:p>
@@ -2920,7 +2973,7 @@
           <a:p>
             <a:fld id="{927FDCA2-3392-4A1A-9223-3DBB816C2ADB}" type="datetimeFigureOut">
               <a:rPr lang="en-GB" smtClean="0"/>
-              <a:t>05/06/2026</a:t>
+              <a:t>07/06/2026</a:t>
             </a:fld>
             <a:endParaRPr lang="en-GB"/>
           </a:p>
@@ -4286,7 +4339,15 @@
           <a:p>
             <a:r>
               <a:rPr lang="en-GB" dirty="0"/>
-              <a:t>K ≈ M Zone → “power matching maturity” (stability zone).</a:t>
+              <a:t>K ≈ M Zone → “power matching maturity” (</a:t>
+            </a:r>
+            <a:r>
+              <a:rPr lang="en-GB" b="1" dirty="0"/>
+              <a:t>stability zone</a:t>
+            </a:r>
+            <a:r>
+              <a:rPr lang="en-GB" dirty="0"/>
+              <a:t>).</a:t>
             </a:r>
           </a:p>
         </p:txBody>
@@ -4317,6 +4378,78 @@
           <a:ln>
             <a:tailEnd type="triangle"/>
           </a:ln>
+        </p:spPr>
+        <p:style>
+          <a:lnRef idx="2">
+            <a:schemeClr val="accent1"/>
+          </a:lnRef>
+          <a:fillRef idx="0">
+            <a:schemeClr val="accent1"/>
+          </a:fillRef>
+          <a:effectRef idx="1">
+            <a:schemeClr val="accent1"/>
+          </a:effectRef>
+          <a:fontRef idx="minor">
+            <a:schemeClr val="tx1"/>
+          </a:fontRef>
+        </p:style>
+      </p:cxnSp>
+      <p:cxnSp>
+        <p:nvCxnSpPr>
+          <p:cNvPr id="3" name="Straight Connector 2">
+            <a:extLst>
+              <a:ext uri="{FF2B5EF4-FFF2-40B4-BE49-F238E27FC236}">
+                <a16:creationId xmlns:a16="http://schemas.microsoft.com/office/drawing/2014/main" id="{8A83D3BC-7C20-6DDA-E88F-CB9000D04916}"/>
+              </a:ext>
+            </a:extLst>
+          </p:cNvPr>
+          <p:cNvCxnSpPr/>
+          <p:nvPr/>
+        </p:nvCxnSpPr>
+        <p:spPr>
+          <a:xfrm flipV="1">
+            <a:off x="3382386" y="448863"/>
+            <a:ext cx="4561869" cy="4453877"/>
+          </a:xfrm>
+          <a:prstGeom prst="line">
+            <a:avLst/>
+          </a:prstGeom>
+        </p:spPr>
+        <p:style>
+          <a:lnRef idx="2">
+            <a:schemeClr val="accent1"/>
+          </a:lnRef>
+          <a:fillRef idx="0">
+            <a:schemeClr val="accent1"/>
+          </a:fillRef>
+          <a:effectRef idx="1">
+            <a:schemeClr val="accent1"/>
+          </a:effectRef>
+          <a:fontRef idx="minor">
+            <a:schemeClr val="tx1"/>
+          </a:fontRef>
+        </p:style>
+      </p:cxnSp>
+      <p:cxnSp>
+        <p:nvCxnSpPr>
+          <p:cNvPr id="4" name="Straight Connector 3">
+            <a:extLst>
+              <a:ext uri="{FF2B5EF4-FFF2-40B4-BE49-F238E27FC236}">
+                <a16:creationId xmlns:a16="http://schemas.microsoft.com/office/drawing/2014/main" id="{88B45C41-72B4-C44E-65AF-B70E3347CDF9}"/>
+              </a:ext>
+            </a:extLst>
+          </p:cNvPr>
+          <p:cNvCxnSpPr/>
+          <p:nvPr/>
+        </p:nvCxnSpPr>
+        <p:spPr>
+          <a:xfrm flipV="1">
+            <a:off x="3750015" y="792562"/>
+            <a:ext cx="4561869" cy="4453877"/>
+          </a:xfrm>
+          <a:prstGeom prst="line">
+            <a:avLst/>
+          </a:prstGeom>
         </p:spPr>
         <p:style>
           <a:lnRef idx="2">
